--- a/ToxScout_AI_Hackathon_1  -  Repaired.pptx
+++ b/ToxScout_AI_Hackathon_1  -  Repaired.pptx
@@ -124,7 +124,6 @@
 <p1510:revInfo xmlns:a="http://schemas.openxmlformats.org/drawingml/2006/main" xmlns:r="http://schemas.openxmlformats.org/officeDocument/2006/relationships" xmlns:p1510="http://schemas.microsoft.com/office/powerpoint/2015/10/main">
   <p1510:revLst>
     <p1510:client id="{440425EF-5A9D-4588-BA17-07C5F8E56123}" v="14" dt="2026-04-03T18:39:24.633"/>
-    <p1510:client id="{B328D22C-8157-7D40-D25E-7DCE7CD3A69E}" v="45" dt="2026-04-03T19:07:02.483"/>
   </p1510:revLst>
 </p1510:revInfo>
 </file>
@@ -230,10 +229,25 @@
   <pc:docChgLst>
     <pc:chgData name="Satvik Shrivastava" userId="20b30ab9c7501e4a" providerId="LiveId" clId="{ACE84A37-D795-4AAA-ADE5-B1B5FA5320B6}"/>
     <pc:docChg chg="undo custSel modSld">
-      <pc:chgData name="Satvik Shrivastava" userId="20b30ab9c7501e4a" providerId="LiveId" clId="{ACE84A37-D795-4AAA-ADE5-B1B5FA5320B6}" dt="2026-04-03T18:39:24.633" v="84" actId="20577"/>
+      <pc:chgData name="Satvik Shrivastava" userId="20b30ab9c7501e4a" providerId="LiveId" clId="{ACE84A37-D795-4AAA-ADE5-B1B5FA5320B6}" dt="2026-04-05T10:58:24.530" v="86" actId="20577"/>
       <pc:docMkLst>
         <pc:docMk/>
       </pc:docMkLst>
+      <pc:sldChg chg="modSp mod">
+        <pc:chgData name="Satvik Shrivastava" userId="20b30ab9c7501e4a" providerId="LiveId" clId="{ACE84A37-D795-4AAA-ADE5-B1B5FA5320B6}" dt="2026-04-05T10:58:24.530" v="86" actId="20577"/>
+        <pc:sldMkLst>
+          <pc:docMk/>
+          <pc:sldMk cId="0" sldId="261"/>
+        </pc:sldMkLst>
+        <pc:spChg chg="mod">
+          <ac:chgData name="Satvik Shrivastava" userId="20b30ab9c7501e4a" providerId="LiveId" clId="{ACE84A37-D795-4AAA-ADE5-B1B5FA5320B6}" dt="2026-04-05T10:58:24.530" v="86" actId="20577"/>
+          <ac:spMkLst>
+            <pc:docMk/>
+            <pc:sldMk cId="0" sldId="261"/>
+            <ac:spMk id="12" creationId="{00000000-0000-0000-0000-000000000000}"/>
+          </ac:spMkLst>
+        </pc:spChg>
+      </pc:sldChg>
       <pc:sldChg chg="modSp mod">
         <pc:chgData name="Satvik Shrivastava" userId="20b30ab9c7501e4a" providerId="LiveId" clId="{ACE84A37-D795-4AAA-ADE5-B1B5FA5320B6}" dt="2026-04-03T16:13:15.863" v="38" actId="20577"/>
         <pc:sldMkLst>
@@ -255,38 +269,6 @@
           <pc:docMk/>
           <pc:sldMk cId="0" sldId="268"/>
         </pc:sldMkLst>
-        <pc:spChg chg="del">
-          <ac:chgData name="Satvik Shrivastava" userId="20b30ab9c7501e4a" providerId="LiveId" clId="{ACE84A37-D795-4AAA-ADE5-B1B5FA5320B6}" dt="2026-04-03T16:13:31.965" v="39" actId="478"/>
-          <ac:spMkLst>
-            <pc:docMk/>
-            <pc:sldMk cId="0" sldId="268"/>
-            <ac:spMk id="21" creationId="{00000000-0000-0000-0000-000000000000}"/>
-          </ac:spMkLst>
-        </pc:spChg>
-        <pc:spChg chg="del">
-          <ac:chgData name="Satvik Shrivastava" userId="20b30ab9c7501e4a" providerId="LiveId" clId="{ACE84A37-D795-4AAA-ADE5-B1B5FA5320B6}" dt="2026-04-03T16:13:49.595" v="46" actId="478"/>
-          <ac:spMkLst>
-            <pc:docMk/>
-            <pc:sldMk cId="0" sldId="268"/>
-            <ac:spMk id="22" creationId="{00000000-0000-0000-0000-000000000000}"/>
-          </ac:spMkLst>
-        </pc:spChg>
-        <pc:spChg chg="del mod">
-          <ac:chgData name="Satvik Shrivastava" userId="20b30ab9c7501e4a" providerId="LiveId" clId="{ACE84A37-D795-4AAA-ADE5-B1B5FA5320B6}" dt="2026-04-03T16:13:41.974" v="43" actId="478"/>
-          <ac:spMkLst>
-            <pc:docMk/>
-            <pc:sldMk cId="0" sldId="268"/>
-            <ac:spMk id="24" creationId="{00000000-0000-0000-0000-000000000000}"/>
-          </ac:spMkLst>
-        </pc:spChg>
-        <pc:spChg chg="del mod">
-          <ac:chgData name="Satvik Shrivastava" userId="20b30ab9c7501e4a" providerId="LiveId" clId="{ACE84A37-D795-4AAA-ADE5-B1B5FA5320B6}" dt="2026-04-03T16:13:48.610" v="45" actId="478"/>
-          <ac:spMkLst>
-            <pc:docMk/>
-            <pc:sldMk cId="0" sldId="268"/>
-            <ac:spMk id="25" creationId="{00000000-0000-0000-0000-000000000000}"/>
-          </ac:spMkLst>
-        </pc:spChg>
         <pc:spChg chg="mod">
           <ac:chgData name="Satvik Shrivastava" userId="20b30ab9c7501e4a" providerId="LiveId" clId="{ACE84A37-D795-4AAA-ADE5-B1B5FA5320B6}" dt="2026-04-03T16:14:01.625" v="48" actId="1076"/>
           <ac:spMkLst>
@@ -8011,22 +7993,22 @@
               <a:buNone/>
             </a:pPr>
             <a:r>
-              <a:rPr lang="en-US" b="1">
+              <a:rPr lang="en-US" b="1" dirty="0">
                 <a:solidFill>
                   <a:srgbClr val="22C55E"/>
                 </a:solidFill>
               </a:rPr>
-              <a:t>93.2</a:t>
-            </a:r>
-            <a:r>
-              <a:rPr lang="en-US" sz="1800" b="1">
+              <a:t>83.2</a:t>
+            </a:r>
+            <a:r>
+              <a:rPr lang="en-US" sz="1800" b="1" dirty="0">
                 <a:solidFill>
                   <a:srgbClr val="22C55E"/>
                 </a:solidFill>
               </a:rPr>
               <a:t>%</a:t>
             </a:r>
-            <a:endParaRPr lang="en-US" sz="1800"/>
+            <a:endParaRPr lang="en-US" sz="1800" dirty="0"/>
           </a:p>
         </p:txBody>
       </p:sp>
